--- a/cursos/recursos/arbitro-nacional/11-ajedrez-rapido-que-cambia-y-que-sigue-igual-respecto-al-control-clasico.pptx
+++ b/cursos/recursos/arbitro-nacional/11-ajedrez-rapido-que-cambia-y-que-sigue-igual-respecto-al-control-clasico.pptx
@@ -3955,7 +3955,7 @@
                 </a:solidFill>
                 <a:latin typeface="Calibri"/>
               </a:rPr>
-              <a:t>El cambio más importante en jugadas ilegales: en rápidas, si un árbitro está presente cerca de la mesa, se aplica el mismo artículo 7.5 del control clásico; pero sin árbitro presente en la mesa (torneos grandes, un árbitro para muchos tableros), la primera jugada ilegal detectada por el rival puede reclamarse directamente como pérdida de la partida, salvo que el rival no pueda dar mate por ninguna secuencia legal (art. A.4.2) — el mismo criterio del 6.9 y 7.5.5, aplicado con un procedimiento más rápido porque no hay tiempo de esperar al árbitro.</a:t>
+              <a:t>El apéndice A distingue dos escenarios según cuánta supervisión hay, y ahí está el cambio real de procedimiento en jugadas ilegales. Con "Reglas de Competencia" (art. A.4: un árbitro por cada tres partidas como máximo, todas anotadas), el procedimiento es igual al del control clásico. Sin esa supervisión cercana (art. A.5, "en cualquier otro caso"), lo que cambia es solo el margen para reclamar: el árbitro actúa según el mismo artículo 7.5.5 si ve la jugada ilegal antes de que el rival haya movido; si no interviene, el rival puede reclamarla, pero solo antes de hacer SU PROPIA siguiente jugada — pasado ese momento, la jugada ilegal queda en pie y la partida sigue. Lo que NO cambia en ninguno de los dos casos es que hace falta una SEGUNDA jugada ilegal del mismo jugador para perder la partida: no hay pérdida a la primera, ni siquiera sin árbitro cerca.</a:t>
             </a:r>
           </a:p>
         </p:txBody>
@@ -4198,7 +4198,7 @@
                 </a:solidFill>
                 <a:latin typeface="Calibri"/>
               </a:rPr>
-              <a:t>Desde la revisión de 2023, la sanción por primera jugada ilegal en rápidas y relámpago con árbitro presente bajó a UN minuto (antes eran dos, igual que en clásico) — es uno de los pocos números que cambian entre apéndices y conviene tenerlo fresco, porque equivocarse en el tiempo de la sanción es un error que se nota de inmediato.</a:t>
+              <a:t>Desde la revisión de 2023, el artículo A.3 reduce a UN minuto (en vez de dos) las sanciones de los artículos 7 y 9 en TODO el apéndice A — con árbitro dedicado (A.4) o sin él (A.5), es la misma reducción, no un privilegio de uno de los dos escenarios. Es uno de los pocos números que cambian entre apéndices y conviene tenerlo fresco, porque equivocarse en el tiempo de la sanción es un error que se nota de inmediato.</a:t>
             </a:r>
           </a:p>
         </p:txBody>
@@ -4696,7 +4696,7 @@
                 </a:solidFill>
                 <a:latin typeface="Cambria"/>
               </a:rPr>
-              <a:t>Comparar, artículo por artículo, el procedimiento de jugada ilegal en control clásico (art. 7.5) contra el de rápidas sin árbitro en la mesa (art. A.4), señalando las tres diferencias exactas de tiempo y de quién puede reclamar qué.</a:t>
+              <a:t>Comparar, artículo por artículo, el procedimiento de jugada ilegal con Reglas de Competencia (art. A.4, árbitro dedicado) contra el de rápidas sin esa supervisión (art. A.5), señalando qué cambia (el margen para reclamar) y qué NO cambia (que hace falta una segunda jugada ilegal para perder).</a:t>
             </a:r>
           </a:p>
         </p:txBody>
